--- a/examples/03-review-before-after/deck.pptx
+++ b/examples/03-review-before-after/deck.pptx
@@ -126,6 +126,17 @@
   <c:chart>
     <c:autoTitleDeleted val="1"/>
     <c:plotArea>
+      <c:layout>
+        <c:manualLayout>
+          <c:layoutTarget val="inner"/>
+          <c:xMode val="edge"/>
+          <c:yMode val="edge"/>
+          <c:x val="0.0200"/>
+          <c:y val="0.0400"/>
+          <c:w val="0.9600"/>
+          <c:h val="0.8940"/>
+        </c:manualLayout>
+      </c:layout>
       <c:barChart>
         <c:barDir val="col"/>
         <c:grouping val="clustered"/>
@@ -290,7 +301,7 @@
       <c:valAx>
         <c:axId val="-2113994440"/>
         <c:scaling>
-          <c:max val="23.632000000000005"/>
+          <c:max val="22.462681672170184"/>
           <c:min val="0.0"/>
         </c:scaling>
         <c:delete/>
@@ -611,6 +622,17 @@
   <c:chart>
     <c:autoTitleDeleted val="1"/>
     <c:plotArea>
+      <c:layout>
+        <c:manualLayout>
+          <c:layoutTarget val="inner"/>
+          <c:xMode val="edge"/>
+          <c:yMode val="edge"/>
+          <c:x val="0.2033"/>
+          <c:y val="0.0200"/>
+          <c:w val="0.7867"/>
+          <c:h val="0.9600"/>
+        </c:manualLayout>
+      </c:layout>
       <c:barChart>
         <c:barDir val="bar"/>
         <c:grouping val="clustered"/>
@@ -769,7 +791,7 @@
       <c:valAx>
         <c:axId val="-2113994440"/>
         <c:scaling>
-          <c:max val="51.919999999999995"/>
+          <c:max val="45.96459260583268"/>
           <c:min val="0.0"/>
         </c:scaling>
         <c:delete/>
@@ -815,6 +837,17 @@
   <c:chart>
     <c:autoTitleDeleted val="1"/>
     <c:plotArea>
+      <c:layout>
+        <c:manualLayout>
+          <c:layoutTarget val="inner"/>
+          <c:xMode val="edge"/>
+          <c:yMode val="edge"/>
+          <c:x val="0.0200"/>
+          <c:y val="0.0400"/>
+          <c:w val="0.9600"/>
+          <c:h val="0.8940"/>
+        </c:manualLayout>
+      </c:layout>
       <c:barChart>
         <c:barDir val="col"/>
         <c:grouping val="clustered"/>
@@ -973,7 +1006,7 @@
       <c:valAx>
         <c:axId val="-2113994440"/>
         <c:scaling>
-          <c:max val="21.28"/>
+          <c:max val="20.227059325650874"/>
           <c:min val="0.0"/>
         </c:scaling>
         <c:delete/>
@@ -8598,8 +8631,8 @@
         </p:nvSpPr>
         <p:spPr>
           <a:xfrm>
-            <a:off x="8097520" y="2014220"/>
-            <a:ext cx="3637280" cy="4254500"/>
+            <a:off x="8097520" y="1959864"/>
+            <a:ext cx="3637280" cy="4308856"/>
           </a:xfrm>
           <a:prstGeom prst="rect">
             <a:avLst/>
@@ -10182,8 +10215,8 @@
         </p:nvSpPr>
         <p:spPr>
           <a:xfrm>
-            <a:off x="8097520" y="2014220"/>
-            <a:ext cx="3637280" cy="4254500"/>
+            <a:off x="8097520" y="1959864"/>
+            <a:ext cx="3637280" cy="4308856"/>
           </a:xfrm>
           <a:prstGeom prst="rect">
             <a:avLst/>
@@ -10735,8 +10768,8 @@
         </p:nvSpPr>
         <p:spPr>
           <a:xfrm>
-            <a:off x="8097520" y="2014220"/>
-            <a:ext cx="3637280" cy="4254500"/>
+            <a:off x="8097520" y="1959864"/>
+            <a:ext cx="3637280" cy="4308856"/>
           </a:xfrm>
           <a:prstGeom prst="rect">
             <a:avLst/>
@@ -12628,8 +12661,8 @@
         </p:nvSpPr>
         <p:spPr>
           <a:xfrm>
-            <a:off x="8097520" y="2014220"/>
-            <a:ext cx="3637280" cy="4254500"/>
+            <a:off x="8097520" y="1959864"/>
+            <a:ext cx="3637280" cy="4308856"/>
           </a:xfrm>
           <a:prstGeom prst="rect">
             <a:avLst/>
@@ -12971,8 +13004,8 @@
         </p:nvSpPr>
         <p:spPr>
           <a:xfrm>
-            <a:off x="8097520" y="2014220"/>
-            <a:ext cx="3637280" cy="4254500"/>
+            <a:off x="8097520" y="1959864"/>
+            <a:ext cx="3637280" cy="4308856"/>
           </a:xfrm>
           <a:prstGeom prst="rect">
             <a:avLst/>
@@ -14225,8 +14258,8 @@
         </p:nvSpPr>
         <p:spPr>
           <a:xfrm>
-            <a:off x="8097520" y="2014220"/>
-            <a:ext cx="3637280" cy="4254500"/>
+            <a:off x="8097520" y="1959864"/>
+            <a:ext cx="3637280" cy="4308856"/>
           </a:xfrm>
           <a:prstGeom prst="rect">
             <a:avLst/>
@@ -14309,9 +14342,9 @@
 </file>
 
 <file path=ppt/theme/theme1.xml><?xml version="1.0" encoding="utf-8"?>
-<a:theme xmlns:a="http://schemas.openxmlformats.org/drawingml/2006/main" name="SoWhat">
+<a:theme xmlns:a="http://schemas.openxmlformats.org/drawingml/2006/main" name="SoWhat Decks">
   <a:themeElements>
-    <a:clrScheme name="SoWhat">
+    <a:clrScheme name="SoWhat Decks">
       <a:dk1>
         <a:srgbClr val="1E2329"/>
       </a:dk1>
@@ -14349,7 +14382,7 @@
         <a:srgbClr val="5A6472"/>
       </a:folHlink>
     </a:clrScheme>
-    <a:fontScheme name="SoWhat">
+    <a:fontScheme name="SoWhat Decks">
       <a:majorFont>
         <a:latin typeface="Georgia"/>
         <a:ea typeface=""/>
